--- a/decks/hist-williams-control/hist-williams-control_ch4_two-chroniclers.pptx
+++ b/decks/hist-williams-control/hist-williams-control_ch4_two-chroniclers.pptx
@@ -128,30 +128,30 @@
   <p:extLst>
     <p:ext uri="{521415D9-36F7-43E2-AB2F-B90AF26B5E84}">
       <p14:sectionLst xmlns:p14="http://schemas.microsoft.com/office/powerpoint/2010/main">
-        <p14:section name="Opening" id="{392ceb22-9fb9-3b26-cf46-42b0404870c1}">
+        <p14:section name="Opening" id="{2db3c5b5-3e65-ce04-3bd2-405c2dc9d5b9}">
           <p14:sldIdLst>
             <p14:sldId id="256"/>
           </p14:sldIdLst>
         </p14:section>
-        <p14:section name="Gate" id="{0951f385-d1de-3d51-5a5a-835c54d1dc20}">
+        <p14:section name="Gate" id="{d7558710-1134-e182-d040-7d43deced019}">
           <p14:sldIdLst>
             <p14:sldId id="257"/>
             <p14:sldId id="258"/>
           </p14:sldIdLst>
         </p14:section>
-        <p14:section name="Pre-teach" id="{646cb196-2c6a-7ae1-275a-a584103da98c}">
+        <p14:section name="Pre-teach" id="{7250b7b7-577d-36a3-b559-1bbd51626968}">
           <p14:sldIdLst>
             <p14:sldId id="259"/>
             <p14:sldId id="260"/>
           </p14:sldIdLst>
         </p14:section>
-        <p14:section name="Read-along" id="{bc9fc8eb-3e50-0ea0-3cc4-2be8cea98470}">
+        <p14:section name="Read-along" id="{4e85c017-76ba-cea9-eb33-c574f9dd1a75}">
           <p14:sldIdLst>
             <p14:sldId id="261"/>
             <p14:sldId id="262"/>
           </p14:sldIdLst>
         </p14:section>
-        <p14:section name="Teach" id="{84d60665-e9d0-64a9-70e0-15e7fb7c2ab4}">
+        <p14:section name="Teach" id="{6e0bf64b-240b-ab7d-1160-1d6f851118fa}">
           <p14:sldIdLst>
             <p14:sldId id="263"/>
             <p14:sldId id="264"/>
@@ -161,7 +161,7 @@
             <p14:sldId id="268"/>
           </p14:sldIdLst>
         </p14:section>
-        <p14:section name="Routes" id="{bf0af07f-157a-4651-767b-340e4a3df780}">
+        <p14:section name="Routes" id="{7e0f28b1-a424-2b28-635c-e8458d44686c}">
           <p14:sldIdLst>
             <p14:sldId id="269"/>
             <p14:sldId id="270"/>
@@ -169,12 +169,12 @@
             <p14:sldId id="272"/>
           </p14:sldIdLst>
         </p14:section>
-        <p14:section name="Close" id="{d73b833f-cb0c-ef43-6c3a-173d55ddd38a}">
+        <p14:section name="Close" id="{45003b50-9f1b-b729-33c2-c148cc5e0a67}">
           <p14:sldIdLst>
             <p14:sldId id="273"/>
           </p14:sldIdLst>
         </p14:section>
-        <p14:section name="Answers" id="{cd9c1a63-5f36-c6e2-0ef9-e3754aa8cacf}">
+        <p14:section name="Answers" id="{90c087bf-8e82-9943-7d76-b0e3cb33e2cf}">
           <p14:sldIdLst>
             <p14:sldId id="274"/>
             <p14:sldId id="275"/>
@@ -678,7 +678,7 @@
             <a:r>
               <a:rPr lang="en-US" dirty="0"/>
               <a:t>Teach — What Orderic Vitalis said. Say it in your own words, then check understanding with a quick question: ask a pupil from the pre-teach group first, since they met these words and ideas before the lesson. Pupils try to recall before you re-explain.
-Orderic describes the destruction itself. The king, he says, stopped at nothing to punish his enemies. He “ordered that crops and herds, tools and food of every kind should be burned to ashes”, and in this way the whole region north of the River Humber was laid waste.
+Orderic describes the destruction itself. The king, he says, stopped at nothing to punish his enemies. He “ordered that crops and herds, tools and food of every kind should be burned to ashes”, and he says that everything north of the River Humber was left in ruins.
 Then he turns to the people. He writes of a “cruel hunger which afflicted the innocent and the guilty alike”, and says that more than one hundred thousand people died of it, in his belief. His last words are a judgement: he cannot commend, meaning praise, this act.
 Orderic does not say the rebels were innocent, and he does not deny that William had enemies in the North. His point is about proportion: the punishment fell on everyone, guilty or not, and the suffering was too great to approve of. That is a different interpretation from Poitiers, built from the same event.
 Quotation: "More than one hundred thousand people perished, I believe, from hunger. I cannot commend this act." (Orderic Vitalis, writing in the 1120s, as printed in your lesson). Read it aloud; ask what it shows.
